--- a/docs/PPT/02-application-orchestration.pptx
+++ b/docs/PPT/02-application-orchestration.pptx
@@ -3788,7 +3788,7 @@
                 </a:solidFill>
                 <a:latin typeface="Calibri"/>
               </a:rPr>
-              <a:t>Every portal link is resolved through a registered portal-link mechanism — Adam never invents a URL.</a:t>
+              <a:t>Every portal link is resolved through a registered portal-link mechanism — PFF Chat AI never invents a URL.</a:t>
             </a:r>
           </a:p>
           <a:p>
@@ -13115,7 +13115,7 @@
                 </a:solidFill>
                 <a:latin typeface="Calibri"/>
               </a:rPr>
-              <a:t>Adam communicates who/what the workflow is waiting for throughout the pending state.</a:t>
+              <a:t>PFF Chat AI communicates who/what the workflow is waiting for throughout the pending state.</a:t>
             </a:r>
           </a:p>
         </p:txBody>
